--- a/examples/ppt/shapes/shapes-typography.pptx
+++ b/examples/ppt/shapes/shapes-typography.pptx
@@ -5,11 +5,11 @@
     <p:sldMasterId xmlns:r="http://schemas.openxmlformats.org/officeDocument/2006/relationships" id="2147483648" r:id="rId1"/>
   </p:sldMasterIdLst>
   <p:sldIdLst>
-    <p:sldId id="256" r:id="Rcccc3c4bbbb94b1f"/>
-    <p:sldId id="257" r:id="Rb72b08d31ac44224"/>
-    <p:sldId id="258" r:id="R3566f67345d04708"/>
-    <p:sldId id="259" r:id="R18d40ad920ea4a71"/>
-    <p:sldId id="260" r:id="Rd6ed120432774012"/>
+    <p:sldId id="256" r:id="R0ac908ff784f4650"/>
+    <p:sldId id="257" r:id="R0f9f9d6ddd494e8d"/>
+    <p:sldId id="258" r:id="R03aac376947a4ddc"/>
+    <p:sldId id="259" r:id="R142f6e9e80264e4b"/>
+    <p:sldId id="260" r:id="R21565c5ec2cb4e49"/>
   </p:sldIdLst>
   <p:sldSz cx="12192000" cy="6858000"/>
   <p:notesSz cx="6858000" cy="9144000"/>
@@ -284,7 +284,7 @@
 </file>
 
 <file path=ppt/slideMasters/slideMaster1.xml><?xml version="1.0" encoding="utf-8"?>
-<p:sldMaster xmlns:p="http://schemas.openxmlformats.org/presentationml/2006/main">
+<p:sldMaster xmlns:r="http://schemas.openxmlformats.org/officeDocument/2006/relationships" xmlns:p="http://schemas.openxmlformats.org/presentationml/2006/main">
   <p:cSld>
     <p:spTree>
       <p:nvGrpSpPr>
